--- a/docs/bham.repetitiveCuffPain.20reps.v3/Instructions.pptx
+++ b/docs/bham.repetitiveCuffPain.20reps.v3/Instructions.pptx
@@ -5,11 +5,12 @@
     <p:sldMasterId id="2147483648" r:id="rId1"/>
   </p:sldMasterIdLst>
   <p:notesMasterIdLst>
-    <p:notesMasterId r:id="rId4"/>
+    <p:notesMasterId r:id="rId5"/>
   </p:notesMasterIdLst>
   <p:sldIdLst>
     <p:sldId id="257" r:id="rId2"/>
     <p:sldId id="256" r:id="rId3"/>
+    <p:sldId id="258" r:id="rId4"/>
   </p:sldIdLst>
   <p:sldSz cx="12192000" cy="6858000"/>
   <p:notesSz cx="6858000" cy="9144000"/>
@@ -198,7 +199,7 @@
           <a:p>
             <a:fld id="{3D8B1B2D-2E52-42CD-9254-88A179079A1A}" type="datetimeFigureOut">
               <a:rPr lang="en-DK" smtClean="0"/>
-              <a:t>05/02/2025</a:t>
+              <a:t>23/07/2026</a:t>
             </a:fld>
             <a:endParaRPr lang="en-DK"/>
           </a:p>
@@ -815,7 +816,7 @@
           <a:p>
             <a:fld id="{4728BE1A-9209-444C-8410-08FE375142FA}" type="datetimeFigureOut">
               <a:rPr lang="en-DK" smtClean="0"/>
-              <a:t>05/02/2025</a:t>
+              <a:t>23/07/2026</a:t>
             </a:fld>
             <a:endParaRPr lang="en-DK"/>
           </a:p>
@@ -1015,7 +1016,7 @@
           <a:p>
             <a:fld id="{4728BE1A-9209-444C-8410-08FE375142FA}" type="datetimeFigureOut">
               <a:rPr lang="en-DK" smtClean="0"/>
-              <a:t>05/02/2025</a:t>
+              <a:t>23/07/2026</a:t>
             </a:fld>
             <a:endParaRPr lang="en-DK"/>
           </a:p>
@@ -1225,7 +1226,7 @@
           <a:p>
             <a:fld id="{4728BE1A-9209-444C-8410-08FE375142FA}" type="datetimeFigureOut">
               <a:rPr lang="en-DK" smtClean="0"/>
-              <a:t>05/02/2025</a:t>
+              <a:t>23/07/2026</a:t>
             </a:fld>
             <a:endParaRPr lang="en-DK"/>
           </a:p>
@@ -1425,7 +1426,7 @@
           <a:p>
             <a:fld id="{4728BE1A-9209-444C-8410-08FE375142FA}" type="datetimeFigureOut">
               <a:rPr lang="en-DK" smtClean="0"/>
-              <a:t>05/02/2025</a:t>
+              <a:t>23/07/2026</a:t>
             </a:fld>
             <a:endParaRPr lang="en-DK"/>
           </a:p>
@@ -1701,7 +1702,7 @@
           <a:p>
             <a:fld id="{4728BE1A-9209-444C-8410-08FE375142FA}" type="datetimeFigureOut">
               <a:rPr lang="en-DK" smtClean="0"/>
-              <a:t>05/02/2025</a:t>
+              <a:t>23/07/2026</a:t>
             </a:fld>
             <a:endParaRPr lang="en-DK"/>
           </a:p>
@@ -1969,7 +1970,7 @@
           <a:p>
             <a:fld id="{4728BE1A-9209-444C-8410-08FE375142FA}" type="datetimeFigureOut">
               <a:rPr lang="en-DK" smtClean="0"/>
-              <a:t>05/02/2025</a:t>
+              <a:t>23/07/2026</a:t>
             </a:fld>
             <a:endParaRPr lang="en-DK"/>
           </a:p>
@@ -2384,7 +2385,7 @@
           <a:p>
             <a:fld id="{4728BE1A-9209-444C-8410-08FE375142FA}" type="datetimeFigureOut">
               <a:rPr lang="en-DK" smtClean="0"/>
-              <a:t>05/02/2025</a:t>
+              <a:t>23/07/2026</a:t>
             </a:fld>
             <a:endParaRPr lang="en-DK"/>
           </a:p>
@@ -2526,7 +2527,7 @@
           <a:p>
             <a:fld id="{4728BE1A-9209-444C-8410-08FE375142FA}" type="datetimeFigureOut">
               <a:rPr lang="en-DK" smtClean="0"/>
-              <a:t>05/02/2025</a:t>
+              <a:t>23/07/2026</a:t>
             </a:fld>
             <a:endParaRPr lang="en-DK"/>
           </a:p>
@@ -2639,7 +2640,7 @@
           <a:p>
             <a:fld id="{4728BE1A-9209-444C-8410-08FE375142FA}" type="datetimeFigureOut">
               <a:rPr lang="en-DK" smtClean="0"/>
-              <a:t>05/02/2025</a:t>
+              <a:t>23/07/2026</a:t>
             </a:fld>
             <a:endParaRPr lang="en-DK"/>
           </a:p>
@@ -2952,7 +2953,7 @@
           <a:p>
             <a:fld id="{4728BE1A-9209-444C-8410-08FE375142FA}" type="datetimeFigureOut">
               <a:rPr lang="en-DK" smtClean="0"/>
-              <a:t>05/02/2025</a:t>
+              <a:t>23/07/2026</a:t>
             </a:fld>
             <a:endParaRPr lang="en-DK"/>
           </a:p>
@@ -3241,7 +3242,7 @@
           <a:p>
             <a:fld id="{4728BE1A-9209-444C-8410-08FE375142FA}" type="datetimeFigureOut">
               <a:rPr lang="en-DK" smtClean="0"/>
-              <a:t>05/02/2025</a:t>
+              <a:t>23/07/2026</a:t>
             </a:fld>
             <a:endParaRPr lang="en-DK"/>
           </a:p>
@@ -3484,7 +3485,7 @@
           <a:p>
             <a:fld id="{4728BE1A-9209-444C-8410-08FE375142FA}" type="datetimeFigureOut">
               <a:rPr lang="en-DK" smtClean="0"/>
-              <a:t>05/02/2025</a:t>
+              <a:t>23/07/2026</a:t>
             </a:fld>
             <a:endParaRPr lang="en-DK"/>
           </a:p>
@@ -5938,6 +5939,75 @@
 </p:sld>
 </file>
 
+<file path=ppt/slides/slide3.xml><?xml version="1.0" encoding="utf-8"?>
+<p:sld xmlns:a="http://schemas.openxmlformats.org/drawingml/2006/main" xmlns:r="http://schemas.openxmlformats.org/officeDocument/2006/relationships" xmlns:p="http://schemas.openxmlformats.org/presentationml/2006/main">
+  <p:cSld>
+    <p:spTree>
+      <p:nvGrpSpPr>
+        <p:cNvPr id="1" name=""/>
+        <p:cNvGrpSpPr/>
+        <p:nvPr/>
+      </p:nvGrpSpPr>
+      <p:grpSpPr>
+        <a:xfrm>
+          <a:off x="0" y="0"/>
+          <a:ext cx="0" cy="0"/>
+          <a:chOff x="0" y="0"/>
+          <a:chExt cx="0" cy="0"/>
+        </a:xfrm>
+      </p:grpSpPr>
+      <p:sp>
+        <p:nvSpPr>
+          <p:cNvPr id="2" name="TextBox 1">
+            <a:extLst>
+              <a:ext uri="{FF2B5EF4-FFF2-40B4-BE49-F238E27FC236}">
+                <a16:creationId xmlns:a16="http://schemas.microsoft.com/office/drawing/2014/main" id="{1C954CC9-656D-9684-D908-3DC8BB79397F}"/>
+              </a:ext>
+            </a:extLst>
+          </p:cNvPr>
+          <p:cNvSpPr txBox="1"/>
+          <p:nvPr/>
+        </p:nvSpPr>
+        <p:spPr>
+          <a:xfrm>
+            <a:off x="1914535" y="3167390"/>
+            <a:ext cx="8362930" cy="523220"/>
+          </a:xfrm>
+          <a:prstGeom prst="rect">
+            <a:avLst/>
+          </a:prstGeom>
+          <a:noFill/>
+        </p:spPr>
+        <p:txBody>
+          <a:bodyPr wrap="none" rtlCol="0">
+            <a:spAutoFit/>
+          </a:bodyPr>
+          <a:lstStyle/>
+          <a:p>
+            <a:r>
+              <a:rPr lang="en-US" sz="2800" dirty="0"/>
+              <a:t>Please run procedure: </a:t>
+            </a:r>
+            <a:r>
+              <a:rPr lang="en-DK" sz="2800" dirty="0"/>
+              <a:t>Handedness of the participant</a:t>
+            </a:r>
+          </a:p>
+        </p:txBody>
+      </p:sp>
+    </p:spTree>
+    <p:extLst>
+      <p:ext uri="{BB962C8B-B14F-4D97-AF65-F5344CB8AC3E}">
+        <p14:creationId xmlns:p14="http://schemas.microsoft.com/office/powerpoint/2010/main" val="2838084951"/>
+      </p:ext>
+    </p:extLst>
+  </p:cSld>
+  <p:clrMapOvr>
+    <a:masterClrMapping/>
+  </p:clrMapOvr>
+</p:sld>
+</file>
+
 <file path=ppt/theme/theme1.xml><?xml version="1.0" encoding="utf-8"?>
 <a:theme xmlns:a="http://schemas.openxmlformats.org/drawingml/2006/main" name="Office Theme">
   <a:themeElements>
